--- a/practice/bai-2-hanh-chinh.pptx
+++ b/practice/bai-2-hanh-chinh.pptx
@@ -1846,7 +1846,7 @@
       </p:sp>
       <p:pic>
         <p:nvPicPr>
-          <p:cNvPr id="3" name="Image 0" descr="/home/user/comdraft/assets/img/dau-huong.png">    </p:cNvPr>
+          <p:cNvPr id="3" name="Image 0" descr="/home/user/ComDraft/assets/img/dau-huong.png">    </p:cNvPr>
           <p:cNvPicPr>
             <a:picLocks noChangeAspect="1"/>
           </p:cNvPicPr>
@@ -1872,7 +1872,7 @@
       </p:pic>
       <p:pic>
         <p:nvPicPr>
-          <p:cNvPr id="4" name="Image 1" descr="/home/user/comdraft/assets/img/lockup-huong.png">    </p:cNvPr>
+          <p:cNvPr id="4" name="Image 1" descr="/home/user/ComDraft/assets/img/lockup-huong.png">    </p:cNvPr>
           <p:cNvPicPr>
             <a:picLocks noChangeAspect="1"/>
           </p:cNvPicPr>
@@ -2147,30 +2147,6 @@
           </a:p>
         </p:txBody>
       </p:sp>
-      <p:pic>
-        <p:nvPicPr>
-          <p:cNvPr id="11" name="Picture 10" descr="co-huong-doc.png"/>
-          <p:cNvPicPr>
-            <a:picLocks noChangeAspect="1"/>
-          </p:cNvPicPr>
-          <p:nvPr/>
-        </p:nvPicPr>
-        <p:blipFill>
-          <a:blip r:embed="rId5"/>
-          <a:stretch>
-            <a:fillRect/>
-          </a:stretch>
-        </p:blipFill>
-        <p:spPr>
-          <a:xfrm>
-            <a:off x="8641080" y="1051560"/>
-            <a:ext cx="3279624" cy="5120640"/>
-          </a:xfrm>
-          <a:prstGeom prst="rect">
-            <a:avLst/>
-          </a:prstGeom>
-        </p:spPr>
-      </p:pic>
     </p:spTree>
   </p:cSld>
   <p:clrMapOvr>
@@ -2205,7 +2181,7 @@
       </p:grpSpPr>
       <p:pic>
         <p:nvPicPr>
-          <p:cNvPr id="2" name="Image 0" descr="/home/user/comdraft/assets/img/dau-huong.png">    </p:cNvPr>
+          <p:cNvPr id="2" name="Image 0" descr="/home/user/ComDraft/assets/img/dau-huong.png">    </p:cNvPr>
           <p:cNvPicPr>
             <a:picLocks noChangeAspect="1"/>
           </p:cNvPicPr>
@@ -2741,7 +2717,7 @@
       </p:grpSpPr>
       <p:pic>
         <p:nvPicPr>
-          <p:cNvPr id="2" name="Image 0" descr="/home/user/comdraft/assets/img/dau-huong.png">    </p:cNvPr>
+          <p:cNvPr id="2" name="Image 0" descr="/home/user/ComDraft/assets/img/dau-huong.png">    </p:cNvPr>
           <p:cNvPicPr>
             <a:picLocks noChangeAspect="1"/>
           </p:cNvPicPr>
@@ -3277,7 +3253,7 @@
       </p:grpSpPr>
       <p:pic>
         <p:nvPicPr>
-          <p:cNvPr id="2" name="Image 0" descr="/home/user/comdraft/assets/img/dau-huong.png">    </p:cNvPr>
+          <p:cNvPr id="2" name="Image 0" descr="/home/user/ComDraft/assets/img/dau-huong.png">    </p:cNvPr>
           <p:cNvPicPr>
             <a:picLocks noChangeAspect="1"/>
           </p:cNvPicPr>
@@ -4016,7 +3992,7 @@
       </p:grpSpPr>
       <p:pic>
         <p:nvPicPr>
-          <p:cNvPr id="2" name="Image 0" descr="/home/user/comdraft/assets/img/dau-huong.png">    </p:cNvPr>
+          <p:cNvPr id="2" name="Image 0" descr="/home/user/ComDraft/assets/img/dau-huong.png">    </p:cNvPr>
           <p:cNvPicPr>
             <a:picLocks noChangeAspect="1"/>
           </p:cNvPicPr>
@@ -4871,7 +4847,7 @@
       </p:grpSpPr>
       <p:pic>
         <p:nvPicPr>
-          <p:cNvPr id="2" name="Image 0" descr="/home/user/comdraft/assets/img/dau-huong.png">    </p:cNvPr>
+          <p:cNvPr id="2" name="Image 0" descr="/home/user/ComDraft/assets/img/dau-huong.png">    </p:cNvPr>
           <p:cNvPicPr>
             <a:picLocks noChangeAspect="1"/>
           </p:cNvPicPr>
@@ -5681,7 +5657,7 @@
       </p:grpSpPr>
       <p:pic>
         <p:nvPicPr>
-          <p:cNvPr id="2" name="Image 0" descr="/home/user/comdraft/assets/img/dau-huong.png">    </p:cNvPr>
+          <p:cNvPr id="2" name="Image 0" descr="/home/user/ComDraft/assets/img/dau-huong.png">    </p:cNvPr>
           <p:cNvPicPr>
             <a:picLocks noChangeAspect="1"/>
           </p:cNvPicPr>
@@ -6015,7 +5991,7 @@
       </p:grpSpPr>
       <p:pic>
         <p:nvPicPr>
-          <p:cNvPr id="2" name="Image 0" descr="/home/user/comdraft/assets/img/dau-huong.png">    </p:cNvPr>
+          <p:cNvPr id="2" name="Image 0" descr="/home/user/ComDraft/assets/img/dau-huong.png">    </p:cNvPr>
           <p:cNvPicPr>
             <a:picLocks noChangeAspect="1"/>
           </p:cNvPicPr>
@@ -6638,7 +6614,7 @@
       </p:grpSpPr>
       <p:pic>
         <p:nvPicPr>
-          <p:cNvPr id="2" name="Image 0" descr="/home/user/comdraft/assets/img/dau-huong.png">    </p:cNvPr>
+          <p:cNvPr id="2" name="Image 0" descr="/home/user/ComDraft/assets/img/dau-huong.png">    </p:cNvPr>
           <p:cNvPicPr>
             <a:picLocks noChangeAspect="1"/>
           </p:cNvPicPr>
@@ -7261,7 +7237,7 @@
       </p:grpSpPr>
       <p:pic>
         <p:nvPicPr>
-          <p:cNvPr id="2" name="Image 0" descr="/home/user/comdraft/assets/img/dau-huong.png">    </p:cNvPr>
+          <p:cNvPr id="2" name="Image 0" descr="/home/user/ComDraft/assets/img/dau-huong.png">    </p:cNvPr>
           <p:cNvPicPr>
             <a:picLocks noChangeAspect="1"/>
           </p:cNvPicPr>
@@ -7595,7 +7571,7 @@
       </p:grpSpPr>
       <p:pic>
         <p:nvPicPr>
-          <p:cNvPr id="2" name="Image 0" descr="/home/user/comdraft/assets/img/dau-huong.png">    </p:cNvPr>
+          <p:cNvPr id="2" name="Image 0" descr="/home/user/ComDraft/assets/img/dau-huong.png">    </p:cNvPr>
           <p:cNvPicPr>
             <a:picLocks noChangeAspect="1"/>
           </p:cNvPicPr>
@@ -8268,30 +8244,6 @@
           </a:p>
         </p:txBody>
       </p:sp>
-      <p:pic>
-        <p:nvPicPr>
-          <p:cNvPr id="21" name="Picture 20" descr="co-huong-tron.png"/>
-          <p:cNvPicPr>
-            <a:picLocks noChangeAspect="1"/>
-          </p:cNvPicPr>
-          <p:nvPr/>
-        </p:nvPicPr>
-        <p:blipFill>
-          <a:blip r:embed="rId4"/>
-          <a:stretch>
-            <a:fillRect/>
-          </a:stretch>
-        </p:blipFill>
-        <p:spPr>
-          <a:xfrm>
-            <a:off x="10378440" y="384048"/>
-            <a:ext cx="960120" cy="960120"/>
-          </a:xfrm>
-          <a:prstGeom prst="rect">
-            <a:avLst/>
-          </a:prstGeom>
-        </p:spPr>
-      </p:pic>
     </p:spTree>
   </p:cSld>
   <p:clrMapOvr>
